--- a/presentations/ZenAI-Midterm-Oct15.pptx
+++ b/presentations/ZenAI-Midterm-Oct15.pptx
@@ -12,6 +12,7 @@
     <p:sldId id="260" r:id="rId12"/>
     <p:sldId id="261" r:id="rId13"/>
     <p:sldId id="262" r:id="rId14"/>
+    <p:sldId id="263" r:id="rId15"/>
   </p:sldIdLst>
   <p:sldSz cx="12191695" cy="6858000" type="screen4x3"/>
   <p:notesSz cx="6858000" cy="9144000"/>
@@ -836,13 +837,19 @@
           <a:p/>
           <a:p>
             <a:r>
-              <a:t>Fill every [VALUE] from the eval notebook. Do NOT present this with a placeholder on it — if a number isn't ready by Oct 13, cut the claim rather than estimating it.</a:t>
+              <a:t>EVERY NUMBER HERE IS REAL, measured on 2026-10-09. Source: models/distress/metrics_baseline.json, metrics_baseline_nosupp.json, ablation_summary.json in the repo. Do not change them without re-running training/train_distress.py.</a:t>
             </a:r>
           </a:p>
           <a:p/>
           <a:p>
             <a:r>
-              <a:t>The recall-over-precision asymmetry is the bit that reads as senior engineering judgment. Spend 30 seconds on it. Put the threshold curve on screen.</a:t>
+              <a:t>Lead with the isolation finding — a class that could not be predicted at all, because the dataset everybody uses has no label for loneliness. That is a real methodological result and it is the most interesting thing on this slide.</a:t>
+            </a:r>
+          </a:p>
+          <a:p/>
+          <a:p>
+            <a:r>
+              <a:t>Be straight about the last bullet. Saying 'the transformer is training and here is the baseline it has to beat' is stronger than implying it is done. If it IS done by Oct 13, replace that bullet with its numbers and say by how much it beat 0.521.</a:t>
             </a:r>
           </a:p>
         </p:txBody>
@@ -912,19 +919,19 @@
           <a:lstStyle/>
           <a:p>
             <a:r>
-              <a:t>Rehearse three times. Seed the database and cache model outputs so this works with the wifi off.</a:t>
+              <a:t>The money chart. Spend 60 seconds here.</a:t>
             </a:r>
           </a:p>
           <a:p/>
           <a:p>
             <a:r>
-              <a:t>If asked why there's no UI: quote the rubric back — GUI doesn't count at this stage, so the effort went into the models. That answer shows you read it.</a:t>
+              <a:t>The argument in one line: we did not just throw more data at it — we identified a specific hole in the standard dataset, filled it from a second source, and measured what that bought. +0.076 macro-F1, and one class went from impossible to usable.</a:t>
             </a:r>
           </a:p>
           <a:p/>
           <a:p>
             <a:r>
-              <a:t>Use a SAFE example message for the crisis demo, and say out loud that it's synthetic.</a:t>
+              <a:t>If asked why overwhelm got slightly WORSE: because the supplement shifted the class balance and overwhelm's source mapping was always weak. We are reporting it rather than hiding it, and the fix is hand-labelling, not more scraping.</a:t>
             </a:r>
           </a:p>
         </p:txBody>
@@ -950,6 +957,94 @@
 </file>
 
 <file path=ppt/notesSlides/notesSlide7.xml><?xml version="1.0" encoding="utf-8"?>
+<p:notes xmlns:a="http://schemas.openxmlformats.org/drawingml/2006/main" xmlns:p="http://schemas.openxmlformats.org/presentationml/2006/main" xmlns:r="http://schemas.openxmlformats.org/officeDocument/2006/relationships">
+  <p:cSld>
+    <p:spTree>
+      <p:nvGrpSpPr>
+        <p:cNvPr id="1" name=""/>
+        <p:cNvGrpSpPr/>
+        <p:nvPr/>
+      </p:nvGrpSpPr>
+      <p:grpSpPr>
+        <a:xfrm>
+          <a:off x="0" y="0"/>
+          <a:ext cx="0" cy="0"/>
+          <a:chOff x="0" y="0"/>
+          <a:chExt cx="0" cy="0"/>
+        </a:xfrm>
+      </p:grpSpPr>
+      <p:sp>
+        <p:nvSpPr>
+          <p:cNvPr id="2" name="Slide Image Placeholder 1"/>
+          <p:cNvSpPr>
+            <a:spLocks noGrp="1"/>
+          </p:cNvSpPr>
+          <p:nvPr>
+            <p:ph type="sldImg" idx="2"/>
+          </p:nvPr>
+        </p:nvSpPr>
+        <p:spPr/>
+      </p:sp>
+      <p:sp>
+        <p:nvSpPr>
+          <p:cNvPr id="3" name="Notes Placeholder 2"/>
+          <p:cNvSpPr>
+            <a:spLocks noGrp="1"/>
+          </p:cNvSpPr>
+          <p:nvPr>
+            <p:ph type="body" idx="3" sz="quarter"/>
+          </p:nvPr>
+        </p:nvSpPr>
+        <p:spPr/>
+        <p:txBody>
+          <a:bodyPr/>
+          <a:lstStyle/>
+          <a:p>
+            <a:r>
+              <a:t>Rehearse three times. Seed the database and cache model outputs so this works with the wifi off.</a:t>
+            </a:r>
+          </a:p>
+          <a:p/>
+          <a:p>
+            <a:r>
+              <a:t>If asked why there's no UI: quote the rubric back — GUI doesn't count at this stage, so the effort went into the models. That answer shows you read it.</a:t>
+            </a:r>
+          </a:p>
+          <a:p/>
+          <a:p>
+            <a:r>
+              <a:t>Use a SAFE example message for the crisis demo, and say out loud that it's synthetic.</a:t>
+            </a:r>
+          </a:p>
+          <a:p/>
+          <a:p>
+            <a:r>
+              <a:t>The distress model is trained and loadable. The crisis rail currently runs on the recall-favouring lexicon floor with the classifier going in on top — say that plainly rather than implying the classifier is live. The lexicon is not a placeholder: it stays after training, ORed with the model, so the model can never talk the floor down.</a:t>
+            </a:r>
+          </a:p>
+        </p:txBody>
+      </p:sp>
+      <p:sp>
+        <p:nvSpPr>
+          <p:cNvPr id="4" name="Slide Number Placeholder 3"/>
+          <p:cNvSpPr>
+            <a:spLocks noGrp="1"/>
+          </p:cNvSpPr>
+          <p:nvPr>
+            <p:ph type="sldNum" idx="5" sz="quarter"/>
+          </p:nvPr>
+        </p:nvSpPr>
+        <p:spPr/>
+      </p:sp>
+    </p:spTree>
+  </p:cSld>
+  <p:clrMapOvr>
+    <a:masterClrMapping/>
+  </p:clrMapOvr>
+</p:notes>
+</file>
+
+<file path=ppt/notesSlides/notesSlide8.xml><?xml version="1.0" encoding="utf-8"?>
 <p:notes xmlns:a="http://schemas.openxmlformats.org/drawingml/2006/main" xmlns:p="http://schemas.openxmlformats.org/presentationml/2006/main" xmlns:r="http://schemas.openxmlformats.org/officeDocument/2006/relationships">
   <p:cSld>
     <p:spTree>
@@ -4848,7 +4943,7 @@
                 </a:solidFill>
                 <a:latin typeface="Georgia"/>
               </a:rPr>
-              <a:t>Core area: two trained models</a:t>
+              <a:t>Core area: the distress model</a:t>
             </a:r>
           </a:p>
         </p:txBody>
@@ -4949,7 +5044,25 @@
                 </a:solidFill>
                 <a:latin typeface="Helvetica Neue"/>
               </a:rPr>
-              <a:t> — GoEmotions (58k) · dair-ai/emotion (20k) · EmpatheticDialogues (25k). Real datasets, held-out splits</a:t>
+              <a:t> — GoEmotions (54,263) + an EmpatheticDialogues supplement → </a:t>
+            </a:r>
+            <a:r>
+              <a:rPr sz="1700" b="1" i="0">
+                <a:solidFill>
+                  <a:srgbClr val="1C2620"/>
+                </a:solidFill>
+                <a:latin typeface="Helvetica Neue"/>
+              </a:rPr>
+              <a:t>86,868 examples</a:t>
+            </a:r>
+            <a:r>
+              <a:rPr sz="1700" b="0" i="0">
+                <a:solidFill>
+                  <a:srgbClr val="1C2620"/>
+                </a:solidFill>
+                <a:latin typeface="Helvetica Neue"/>
+              </a:rPr>
+              <a:t>, 6 distress classes, held-out 15% split</a:t>
             </a:r>
           </a:p>
           <a:p>
@@ -4974,7 +5087,7 @@
                 </a:solidFill>
                 <a:latin typeface="Helvetica Neue"/>
               </a:rPr>
-              <a:t>Model 1 · Distress classifier</a:t>
+              <a:t>Trained and measured</a:t>
             </a:r>
             <a:r>
               <a:rPr sz="1700" b="0" i="0">
@@ -4983,7 +5096,7 @@
                 </a:solidFill>
                 <a:latin typeface="Helvetica Neue"/>
               </a:rPr>
-              <a:t> — distilroberta fine-tune → overwhelm / anxiety / low mood / isolation / anger / neutral</a:t>
+              <a:t> — TF-IDF + logistic regression, class-balanced</a:t>
             </a:r>
           </a:p>
           <a:p>
@@ -4999,7 +5112,52 @@
                 </a:solidFill>
                 <a:latin typeface="Helvetica Neue"/>
               </a:rPr>
-              <a:t>—   macro-F1 [VALUE] vs TF-IDF+logistic baseline [VALUE] vs majority class [VALUE]</a:t>
+              <a:t>—   </a:t>
+            </a:r>
+            <a:r>
+              <a:rPr sz="1700" b="1" i="0">
+                <a:solidFill>
+                  <a:srgbClr val="1C2620"/>
+                </a:solidFill>
+                <a:latin typeface="Helvetica Neue"/>
+              </a:rPr>
+              <a:t>macro-F1 0.521</a:t>
+            </a:r>
+            <a:r>
+              <a:rPr sz="1700" b="0" i="0">
+                <a:solidFill>
+                  <a:srgbClr val="1C2620"/>
+                </a:solidFill>
+                <a:latin typeface="Helvetica Neue"/>
+              </a:rPr>
+              <a:t>  ·  vs GoEmotions-only </a:t>
+            </a:r>
+            <a:r>
+              <a:rPr sz="1700" b="1" i="0">
+                <a:solidFill>
+                  <a:srgbClr val="1C2620"/>
+                </a:solidFill>
+                <a:latin typeface="Helvetica Neue"/>
+              </a:rPr>
+              <a:t>0.445</a:t>
+            </a:r>
+            <a:r>
+              <a:rPr sz="1700" b="0" i="0">
+                <a:solidFill>
+                  <a:srgbClr val="1C2620"/>
+                </a:solidFill>
+                <a:latin typeface="Helvetica Neue"/>
+              </a:rPr>
+              <a:t>  ·  vs majority-class </a:t>
+            </a:r>
+            <a:r>
+              <a:rPr sz="1700" b="1" i="0">
+                <a:solidFill>
+                  <a:srgbClr val="1C2620"/>
+                </a:solidFill>
+                <a:latin typeface="Helvetica Neue"/>
+              </a:rPr>
+              <a:t>0.106</a:t>
             </a:r>
           </a:p>
           <a:p>
@@ -5015,34 +5173,7 @@
                 </a:solidFill>
                 <a:latin typeface="Helvetica Neue"/>
               </a:rPr>
-              <a:t>—   </a:t>
-            </a:r>
-            <a:r>
-              <a:rPr sz="1700" b="1" i="0">
-                <a:solidFill>
-                  <a:srgbClr val="1C2620"/>
-                </a:solidFill>
-                <a:latin typeface="Helvetica Neue"/>
-              </a:rPr>
-              <a:t>Model 2 · Crisis classifier</a:t>
-            </a:r>
-            <a:r>
-              <a:rPr sz="1700" b="0" i="0">
-                <a:solidFill>
-                  <a:srgbClr val="1C2620"/>
-                </a:solidFill>
-                <a:latin typeface="Helvetica Neue"/>
-              </a:rPr>
-              <a:t> — </a:t>
-            </a:r>
-            <a:r>
-              <a:rPr sz="1700" b="1" i="0">
-                <a:solidFill>
-                  <a:srgbClr val="1C2620"/>
-                </a:solidFill>
-                <a:latin typeface="Helvetica Neue"/>
-              </a:rPr>
-              <a:t>optimised for recall, not accuracy</a:t>
+              <a:t>—   Macro-F1, not accuracy — the set is 47% neutral, so accuracy would flatter and say nothing</a:t>
             </a:r>
           </a:p>
           <a:p>
@@ -5058,7 +5189,70 @@
                 </a:solidFill>
                 <a:latin typeface="Helvetica Neue"/>
               </a:rPr>
-              <a:t>—   recall [VALUE] · precision [VALUE] · full confusion matrix · chosen operating point and why</a:t>
+              <a:t>—   </a:t>
+            </a:r>
+            <a:r>
+              <a:rPr sz="1700" b="1" i="0">
+                <a:solidFill>
+                  <a:srgbClr val="1C2620"/>
+                </a:solidFill>
+                <a:latin typeface="Helvetica Neue"/>
+              </a:rPr>
+              <a:t>The finding we didn't expect to need:</a:t>
+            </a:r>
+            <a:r>
+              <a:rPr sz="1700" b="0" i="0">
+                <a:solidFill>
+                  <a:srgbClr val="1C2620"/>
+                </a:solidFill>
+                <a:latin typeface="Helvetica Neue"/>
+              </a:rPr>
+              <a:t> GoEmotions has </a:t>
+            </a:r>
+            <a:r>
+              <a:rPr sz="1700" b="1" i="0">
+                <a:solidFill>
+                  <a:srgbClr val="1C2620"/>
+                </a:solidFill>
+                <a:latin typeface="Helvetica Neue"/>
+              </a:rPr>
+              <a:t>no loneliness label at all</a:t>
+            </a:r>
+            <a:r>
+              <a:rPr sz="1700" b="0" i="0">
+                <a:solidFill>
+                  <a:srgbClr val="1C2620"/>
+                </a:solidFill>
+                <a:latin typeface="Helvetica Neue"/>
+              </a:rPr>
+              <a:t>. isolation scored </a:t>
+            </a:r>
+            <a:r>
+              <a:rPr sz="1700" b="1" i="0">
+                <a:solidFill>
+                  <a:srgbClr val="1C2620"/>
+                </a:solidFill>
+                <a:latin typeface="Helvetica Neue"/>
+              </a:rPr>
+              <a:t>0.00</a:t>
+            </a:r>
+            <a:r>
+              <a:rPr sz="1700" b="0" i="0">
+                <a:solidFill>
+                  <a:srgbClr val="1C2620"/>
+                </a:solidFill>
+                <a:latin typeface="Helvetica Neue"/>
+              </a:rPr>
+              <a:t> — unpredictable. The supplement took it to </a:t>
+            </a:r>
+            <a:r>
+              <a:rPr sz="1700" b="1" i="0">
+                <a:solidFill>
+                  <a:srgbClr val="1C2620"/>
+                </a:solidFill>
+                <a:latin typeface="Helvetica Neue"/>
+              </a:rPr>
+              <a:t>0.47</a:t>
             </a:r>
           </a:p>
           <a:p>
@@ -5083,7 +5277,7 @@
                 </a:solidFill>
                 <a:latin typeface="Helvetica Neue"/>
               </a:rPr>
-              <a:t>The judgment:</a:t>
+              <a:t>The finding we did expect:</a:t>
             </a:r>
             <a:r>
               <a:rPr sz="1700" b="0" i="0">
@@ -5092,7 +5286,59 @@
                 </a:solidFill>
                 <a:latin typeface="Helvetica Neue"/>
               </a:rPr>
-              <a:t> a missed crisis and a false alarm are not the same error. We deliberately paid precision for recall — here is the threshold curve</a:t>
+              <a:t> overwhelm stays weak at </a:t>
+            </a:r>
+            <a:r>
+              <a:rPr sz="1700" b="1" i="0">
+                <a:solidFill>
+                  <a:srgbClr val="1C2620"/>
+                </a:solidFill>
+                <a:latin typeface="Helvetica Neue"/>
+              </a:rPr>
+              <a:t>0.28</a:t>
+            </a:r>
+            <a:r>
+              <a:rPr sz="1700" b="0" i="0">
+                <a:solidFill>
+                  <a:srgbClr val="1C2620"/>
+                </a:solidFill>
+                <a:latin typeface="Helvetica Neue"/>
+              </a:rPr>
+              <a:t>. We map GoEmotions' *confusion* onto it, and a student with three exams is overwhelmed, not confused. It needs its own labels, not more data</a:t>
+            </a:r>
+          </a:p>
+          <a:p>
+            <a:pPr algn="l">
+              <a:spcAft>
+                <a:spcPts val="1500"/>
+              </a:spcAft>
+            </a:pPr>
+            <a:r>
+              <a:rPr sz="1700" b="0" i="0">
+                <a:solidFill>
+                  <a:srgbClr val="1C2620"/>
+                </a:solidFill>
+                <a:latin typeface="Helvetica Neue"/>
+              </a:rPr>
+              <a:t>—   </a:t>
+            </a:r>
+            <a:r>
+              <a:rPr sz="1700" b="1" i="0">
+                <a:solidFill>
+                  <a:srgbClr val="1C2620"/>
+                </a:solidFill>
+                <a:latin typeface="Helvetica Neue"/>
+              </a:rPr>
+              <a:t>In flight for Oct 15</a:t>
+            </a:r>
+            <a:r>
+              <a:rPr sz="1700" b="0" i="0">
+                <a:solidFill>
+                  <a:srgbClr val="1C2620"/>
+                </a:solidFill>
+                <a:latin typeface="Helvetica Neue"/>
+              </a:rPr>
+              <a:t> — distilroberta fine-tune over the same split, and the recall-optimised crisis classifier</a:t>
             </a:r>
           </a:p>
         </p:txBody>
@@ -5106,6 +5352,178 @@
 </file>
 
 <file path=ppt/slides/slide6.xml><?xml version="1.0" encoding="utf-8"?>
+<p:sld xmlns:a="http://schemas.openxmlformats.org/drawingml/2006/main" xmlns:p="http://schemas.openxmlformats.org/presentationml/2006/main" xmlns:r="http://schemas.openxmlformats.org/officeDocument/2006/relationships">
+  <p:cSld>
+    <p:bg>
+      <p:bgPr>
+        <a:solidFill>
+          <a:srgbClr val="FBF9F6"/>
+        </a:solidFill>
+        <a:effectLst/>
+      </p:bgPr>
+    </p:bg>
+    <p:spTree>
+      <p:nvGrpSpPr>
+        <p:cNvPr id="1" name=""/>
+        <p:cNvGrpSpPr/>
+        <p:nvPr/>
+      </p:nvGrpSpPr>
+      <p:grpSpPr/>
+      <p:sp>
+        <p:nvSpPr>
+          <p:cNvPr id="2" name="TextBox 1"/>
+          <p:cNvSpPr txBox="1"/>
+          <p:nvPr/>
+        </p:nvSpPr>
+        <p:spPr>
+          <a:xfrm>
+            <a:off x="731520" y="457200"/>
+            <a:ext cx="10789920" cy="640080"/>
+          </a:xfrm>
+          <a:prstGeom prst="rect">
+            <a:avLst/>
+          </a:prstGeom>
+          <a:noFill/>
+        </p:spPr>
+        <p:txBody>
+          <a:bodyPr wrap="square" lIns="0" rIns="0" tIns="0" bIns="0">
+            <a:spAutoFit/>
+          </a:bodyPr>
+          <a:lstStyle/>
+          <a:p>
+            <a:pPr algn="l">
+              <a:spcAft>
+                <a:spcPts val="800"/>
+              </a:spcAft>
+            </a:pPr>
+            <a:r>
+              <a:rPr sz="2800" b="0" i="0">
+                <a:solidFill>
+                  <a:srgbClr val="1C2620"/>
+                </a:solidFill>
+                <a:latin typeface="Georgia"/>
+              </a:rPr>
+              <a:t>The ablation — does the supplement earn its place?</a:t>
+            </a:r>
+          </a:p>
+        </p:txBody>
+      </p:sp>
+      <p:sp>
+        <p:nvSpPr>
+          <p:cNvPr id="3" name="Rectangle 2"/>
+          <p:cNvSpPr/>
+          <p:nvPr/>
+        </p:nvSpPr>
+        <p:spPr>
+          <a:xfrm>
+            <a:off x="731520" y="1078992"/>
+            <a:ext cx="1188720" cy="32004"/>
+          </a:xfrm>
+          <a:prstGeom prst="rect">
+            <a:avLst/>
+          </a:prstGeom>
+          <a:solidFill>
+            <a:srgbClr val="2F6F5E"/>
+          </a:solidFill>
+          <a:ln>
+            <a:noFill/>
+          </a:ln>
+          <a:effectLst/>
+        </p:spPr>
+        <p:style>
+          <a:lnRef idx="1">
+            <a:schemeClr val="accent1"/>
+          </a:lnRef>
+          <a:fillRef idx="3">
+            <a:schemeClr val="accent1"/>
+          </a:fillRef>
+          <a:effectRef idx="2">
+            <a:schemeClr val="accent1"/>
+          </a:effectRef>
+          <a:fontRef idx="minor">
+            <a:schemeClr val="lt1"/>
+          </a:fontRef>
+        </p:style>
+        <p:txBody>
+          <a:bodyPr rtlCol="0" anchor="ctr"/>
+          <a:lstStyle/>
+          <a:p>
+            <a:pPr algn="ctr"/>
+          </a:p>
+        </p:txBody>
+      </p:sp>
+      <p:pic>
+        <p:nvPicPr>
+          <p:cNvPr id="4" name="Picture 3" descr="05-ablation.png"/>
+          <p:cNvPicPr>
+            <a:picLocks noChangeAspect="1"/>
+          </p:cNvPicPr>
+          <p:nvPr/>
+        </p:nvPicPr>
+        <p:blipFill>
+          <a:blip r:embed="rId2"/>
+          <a:stretch>
+            <a:fillRect/>
+          </a:stretch>
+        </p:blipFill>
+        <p:spPr>
+          <a:xfrm>
+            <a:off x="3059723" y="1371600"/>
+            <a:ext cx="6072249" cy="4754880"/>
+          </a:xfrm>
+          <a:prstGeom prst="rect">
+            <a:avLst/>
+          </a:prstGeom>
+        </p:spPr>
+      </p:pic>
+      <p:sp>
+        <p:nvSpPr>
+          <p:cNvPr id="5" name="TextBox 4"/>
+          <p:cNvSpPr txBox="1"/>
+          <p:nvPr/>
+        </p:nvSpPr>
+        <p:spPr>
+          <a:xfrm>
+            <a:off x="731520" y="6263640"/>
+            <a:ext cx="10789920" cy="457200"/>
+          </a:xfrm>
+          <a:prstGeom prst="rect">
+            <a:avLst/>
+          </a:prstGeom>
+          <a:noFill/>
+        </p:spPr>
+        <p:txBody>
+          <a:bodyPr wrap="square" lIns="0" rIns="0" tIns="0" bIns="0">
+            <a:spAutoFit/>
+          </a:bodyPr>
+          <a:lstStyle/>
+          <a:p>
+            <a:pPr algn="l">
+              <a:spcAft>
+                <a:spcPts val="800"/>
+              </a:spcAft>
+            </a:pPr>
+            <a:r>
+              <a:rPr sz="1300" b="0" i="1">
+                <a:solidFill>
+                  <a:srgbClr val="6B7A72"/>
+                </a:solidFill>
+                <a:latin typeface="Helvetica Neue"/>
+              </a:rPr>
+              <a:t>Held-out 15% split · macro-F1 · TF-IDF + logistic regression, class-balanced</a:t>
+            </a:r>
+          </a:p>
+        </p:txBody>
+      </p:sp>
+    </p:spTree>
+  </p:cSld>
+  <p:clrMapOvr>
+    <a:masterClrMapping/>
+  </p:clrMapOvr>
+</p:sld>
+</file>
+
+<file path=ppt/slides/slide7.xml><?xml version="1.0" encoding="utf-8"?>
 <p:sld xmlns:a="http://schemas.openxmlformats.org/drawingml/2006/main" xmlns:p="http://schemas.openxmlformats.org/presentationml/2006/main" xmlns:r="http://schemas.openxmlformats.org/officeDocument/2006/relationships">
   <p:cSld>
     <p:bg>
@@ -5240,7 +5658,7 @@
                 </a:solidFill>
                 <a:latin typeface="Helvetica Neue"/>
               </a:rPr>
-              <a:t>—   POST /analyze — a student message in, distress distribution and risk score out</a:t>
+              <a:t>—   POST /analyze — a student message in, distress distribution and crisis risk out</a:t>
             </a:r>
           </a:p>
           <a:p>
@@ -5256,7 +5674,16 @@
                 </a:solidFill>
                 <a:latin typeface="Helvetica Neue"/>
               </a:rPr>
-              <a:t>—   A crisis-flagged message → the escalation path fires, conversation stops</a:t>
+              <a:t>—   A crisis-flagged message → </a:t>
+            </a:r>
+            <a:r>
+              <a:rPr sz="1700" b="1" i="0">
+                <a:solidFill>
+                  <a:srgbClr val="1C2620"/>
+                </a:solidFill>
+                <a:latin typeface="Helvetica Neue"/>
+              </a:rPr>
+              <a:t>the escalation path fires and the conversation stops</a:t>
             </a:r>
           </a:p>
           <a:p>
@@ -5272,7 +5699,16 @@
                 </a:solidFill>
                 <a:latin typeface="Helvetica Neue"/>
               </a:rPr>
-              <a:t>—   GET /runs/{id} — the full trace: which agents fired, in what order, what it cost</a:t>
+              <a:t>—   The safety ordering, live: Privacy → Crisis → everything else. </a:t>
+            </a:r>
+            <a:r>
+              <a:rPr sz="1700" b="1" i="0">
+                <a:solidFill>
+                  <a:srgbClr val="1C2620"/>
+                </a:solidFill>
+                <a:latin typeface="Helvetica Neue"/>
+              </a:rPr>
+              <a:t>No therapy content is generated for a turn that trips the rail</a:t>
             </a:r>
           </a:p>
           <a:p>
@@ -5310,7 +5746,7 @@
 </p:sld>
 </file>
 
-<file path=ppt/slides/slide7.xml><?xml version="1.0" encoding="utf-8"?>
+<file path=ppt/slides/slide8.xml><?xml version="1.0" encoding="utf-8"?>
 <p:sld xmlns:a="http://schemas.openxmlformats.org/drawingml/2006/main" xmlns:p="http://schemas.openxmlformats.org/presentationml/2006/main" xmlns:r="http://schemas.openxmlformats.org/officeDocument/2006/relationships">
   <p:cSld>
     <p:bg>

--- a/presentations/ZenAI-Midterm-Oct15.pptx
+++ b/presentations/ZenAI-Midterm-Oct15.pptx
@@ -667,19 +667,46 @@
           <a:lstStyle/>
           <a:p>
             <a:r>
-              <a:t>REPLACE with the Lucidchart render of diagram 1 (zenai-lucidchart-diagrams.md). Built components shaded, unbuilt outlined — the diagram filling in across three presentations IS the progress story.</a:t>
+              <a:t>Walk it in this order, 60 seconds:</a:t>
             </a:r>
           </a:p>
           <a:p/>
           <a:p>
             <a:r>
-              <a:t>On Oct 15 shaded: Orchestrator, Mood Check-In, Crisis &amp; Safety, Privacy. Outlined: everything else.</a:t>
+              <a:t>1. TIER 0, every single turn — Privacy redacts, then Crisis &amp; Safety scores risk. Risk detected and we escalate: 988, campus counseling, and the conversation STOPS. No therapy content is generated for that turn at all.</a:t>
+            </a:r>
+          </a:p>
+          <a:p>
+            <a:r>
+              <a:t>2. TIER 1, the core loop — Orchestrator → Mood Check-In (the trained model) → Memory → Conversation on the ACT/CBT protocol → the Fidelity Monitor.</a:t>
+            </a:r>
+          </a:p>
+          <a:p>
+            <a:r>
+              <a:t>3. TIER 2 — four specialists the orchestrator routes to, not always on.</a:t>
+            </a:r>
+          </a:p>
+          <a:p>
+            <a:r>
+              <a:t>4. TIER 3 — the Progress agent, trends across weeks.</a:t>
             </a:r>
           </a:p>
           <a:p/>
           <a:p>
             <a:r>
-              <a:t>Have the sequence diagram (diagram 2) as a backup slide for 'how does it actually work?'</a:t>
+              <a:t>THE YELLOW BOX IS THE CONTRIBUTION. Every reply is scored against the six ACT processes before the student sees it; drift into advice, diagnosis or false reassurance is rejected and regenerated. Note the arrow looping back from the monitor to the Conversation Agent — that loop is the whole idea.</a:t>
+            </a:r>
+          </a:p>
+          <a:p/>
+          <a:p>
+            <a:r>
+              <a:t>Built today: Orchestrator, Mood Check-In, Crisis &amp; Safety, Privacy. Everything else is scaffolded and scheduled.</a:t>
+            </a:r>
+          </a:p>
+          <a:p/>
+          <a:p>
+            <a:r>
+              <a:t>Keep diagram 2 (the one-turn sequence) as a backup slide for 'but how does it actually work?'</a:t>
             </a:r>
           </a:p>
         </p:txBody>
@@ -749,7 +776,13 @@
           <a:lstStyle/>
           <a:p>
             <a:r>
-              <a:t>The rubric says verbatim 'show your development environment.' This slide is points. Screenshot it — do not run compose live unless rehearsed and fast.</a:t>
+              <a:t>ADD THE SCREENSHOT HERE once you have it: run `docker compose up`, let all services go healthy, screenshot the terminal, save it to artifacts/media/ and set this slide's "image" to that path with layout "split". Until then it renders as bullets, which is fine.</a:t>
+            </a:r>
+          </a:p>
+          <a:p/>
+          <a:p>
+            <a:r>
+              <a:t>The rubric says verbatim 'show your development environment' — this slide is points. Do not try to run compose live unless it is rehearsed and fast.</a:t>
             </a:r>
           </a:p>
           <a:p/>
@@ -4473,7 +4506,7 @@
         </p:nvSpPr>
         <p:spPr>
           <a:xfrm>
-            <a:off x="731520" y="502920"/>
+            <a:off x="731520" y="457200"/>
             <a:ext cx="10789920" cy="640080"/>
           </a:xfrm>
           <a:prstGeom prst="rect">
@@ -4493,7 +4526,7 @@
               </a:spcAft>
             </a:pPr>
             <a:r>
-              <a:rPr sz="3000" b="0" i="0">
+              <a:rPr sz="2800" b="0" i="0">
                 <a:solidFill>
                   <a:srgbClr val="1C2620"/>
                 </a:solidFill>
@@ -4512,7 +4545,7 @@
         </p:nvSpPr>
         <p:spPr>
           <a:xfrm>
-            <a:off x="731520" y="1143000"/>
+            <a:off x="731520" y="1078992"/>
             <a:ext cx="1188720" cy="32004"/>
           </a:xfrm>
           <a:prstGeom prst="rect">
@@ -4564,8 +4597,8 @@
         </p:blipFill>
         <p:spPr>
           <a:xfrm>
-            <a:off x="2331720" y="1417320"/>
-            <a:ext cx="5157769" cy="4709160"/>
+            <a:off x="3412849" y="1371600"/>
+            <a:ext cx="5365996" cy="4754880"/>
           </a:xfrm>
           <a:prstGeom prst="rect">
             <a:avLst/>
@@ -4606,7 +4639,7 @@
                 </a:solidFill>
                 <a:latin typeface="Helvetica Neue"/>
               </a:rPr>
-              <a:t>Shaded = built.  Outlined = next.  The yellow box is the contribution.</a:t>
+              <a:t>Safety rail runs on every turn, before any therapy content exists · the yellow box is the contribution</a:t>
             </a:r>
           </a:p>
         </p:txBody>
@@ -4729,7 +4762,7 @@
         <p:spPr>
           <a:xfrm>
             <a:off x="731520" y="1691640"/>
-            <a:ext cx="6492240" cy="4572000"/>
+            <a:ext cx="10789920" cy="4572000"/>
           </a:xfrm>
           <a:prstGeom prst="rect">
             <a:avLst/>
@@ -4754,7 +4787,25 @@
                 </a:solidFill>
                 <a:latin typeface="Helvetica Neue"/>
               </a:rPr>
-              <a:t>—   docker compose up — api · worker · postgres+pgvector · redis</a:t>
+              <a:t>—   </a:t>
+            </a:r>
+            <a:r>
+              <a:rPr sz="1700" b="1" i="0">
+                <a:solidFill>
+                  <a:srgbClr val="1C2620"/>
+                </a:solidFill>
+                <a:latin typeface="Helvetica Neue"/>
+              </a:rPr>
+              <a:t>github.com/Chinonsocheq21/Zenai</a:t>
+            </a:r>
+            <a:r>
+              <a:rPr sz="1700" b="0" i="0">
+                <a:solidFill>
+                  <a:srgbClr val="1C2620"/>
+                </a:solidFill>
+                <a:latin typeface="Helvetica Neue"/>
+              </a:rPr>
+              <a:t> — 6 commits, CI green, verified from a clean clone</a:t>
             </a:r>
           </a:p>
           <a:p>
@@ -4770,7 +4821,7 @@
                 </a:solidFill>
                 <a:latin typeface="Helvetica Neue"/>
               </a:rPr>
-              <a:t>—   Schema from the ER model: sessions · turns · mood_points · fidelity_scores · escalations</a:t>
+              <a:t>—   ./setup.sh — one command from clone to a working trainer. No Docker required</a:t>
             </a:r>
           </a:p>
           <a:p>
@@ -4786,7 +4837,7 @@
                 </a:solidFill>
                 <a:latin typeface="Helvetica Neue"/>
               </a:rPr>
-              <a:t>—   GitHub Actions green on every PR; main branch-protected</a:t>
+              <a:t>—   docker compose up — api · postgres+pgvector · redis</a:t>
             </a:r>
           </a:p>
           <a:p>
@@ -4802,7 +4853,34 @@
                 </a:solidFill>
                 <a:latin typeface="Helvetica Neue"/>
               </a:rPr>
-              <a:t>—   Every model call logged to runs — latency and cost</a:t>
+              <a:t>—   9-table schema from the ER model: sessions · turns · mood_points · </a:t>
+            </a:r>
+            <a:r>
+              <a:rPr sz="1700" b="1" i="0">
+                <a:solidFill>
+                  <a:srgbClr val="1C2620"/>
+                </a:solidFill>
+                <a:latin typeface="Helvetica Neue"/>
+              </a:rPr>
+              <a:t>fidelity_scores</a:t>
+            </a:r>
+            <a:r>
+              <a:rPr sz="1700" b="0" i="0">
+                <a:solidFill>
+                  <a:srgbClr val="1C2620"/>
+                </a:solidFill>
+                <a:latin typeface="Helvetica Neue"/>
+              </a:rPr>
+              <a:t> · </a:t>
+            </a:r>
+            <a:r>
+              <a:rPr sz="1700" b="1" i="0">
+                <a:solidFill>
+                  <a:srgbClr val="1C2620"/>
+                </a:solidFill>
+                <a:latin typeface="Helvetica Neue"/>
+              </a:rPr>
+              <a:t>escalations</a:t>
             </a:r>
           </a:p>
           <a:p>
@@ -4818,67 +4896,23 @@
                 </a:solidFill>
                 <a:latin typeface="Helvetica Neue"/>
               </a:rPr>
-              <a:t>—   Diagrams as code in the repo, rendered in Lucidchart</a:t>
-            </a:r>
-          </a:p>
-        </p:txBody>
-      </p:sp>
-      <p:sp>
-        <p:nvSpPr>
-          <p:cNvPr id="5" name="Rectangle 4"/>
-          <p:cNvSpPr/>
-          <p:nvPr/>
-        </p:nvSpPr>
-        <p:spPr>
-          <a:xfrm>
-            <a:off x="7589520" y="1691640"/>
-            <a:ext cx="3840480" cy="4023360"/>
-          </a:xfrm>
-          <a:prstGeom prst="rect">
-            <a:avLst/>
-          </a:prstGeom>
-          <a:solidFill>
-            <a:srgbClr val="F2EFE9"/>
-          </a:solidFill>
-          <a:ln>
-            <a:solidFill>
-              <a:srgbClr val="E4E0D8"/>
-            </a:solidFill>
-          </a:ln>
-          <a:effectLst/>
-        </p:spPr>
-        <p:style>
-          <a:lnRef idx="1">
-            <a:schemeClr val="accent1"/>
-          </a:lnRef>
-          <a:fillRef idx="3">
-            <a:schemeClr val="accent1"/>
-          </a:fillRef>
-          <a:effectRef idx="2">
-            <a:schemeClr val="accent1"/>
-          </a:effectRef>
-          <a:fontRef idx="minor">
-            <a:schemeClr val="lt1"/>
-          </a:fontRef>
-        </p:style>
-        <p:txBody>
-          <a:bodyPr rtlCol="0" anchor="ctr" wrap="square"/>
-          <a:lstStyle/>
-          <a:p>
-            <a:pPr algn="ctr">
+              <a:t>—   Diagrams as code in the repo, rendered to PNG — the map is never stale at a presentation</a:t>
+            </a:r>
+          </a:p>
+          <a:p>
+            <a:pPr algn="l">
               <a:spcAft>
-                <a:spcPts val="800"/>
+                <a:spcPts val="1500"/>
               </a:spcAft>
             </a:pPr>
             <a:r>
-              <a:rPr sz="1300" b="0" i="1">
-                <a:solidFill>
-                  <a:srgbClr val="6B7A72"/>
+              <a:rPr sz="1700" b="0" i="0">
+                <a:solidFill>
+                  <a:srgbClr val="1C2620"/>
                 </a:solidFill>
                 <a:latin typeface="Helvetica Neue"/>
               </a:rPr>
-              <a:t>[ screenshot: docker compose up,
-4 services healthy + green CI ]</a:t>
+              <a:t>—   Every result reproducible: results/ holds the metrics, training/ the code that made them</a:t>
             </a:r>
           </a:p>
         </p:txBody>
